--- a/ПрПр/лекции/ПрПр Лекция 4.pptx
+++ b/ПрПр/лекции/ПрПр Лекция 4.pptx
@@ -297,7 +297,7 @@
             <a:fld id="{5B106E36-FD25-4E2D-B0AA-010F637433A0}" type="datetimeFigureOut">
               <a:rPr lang="ru-RU" smtClean="0"/>
               <a:pPr/>
-              <a:t>24.09.2026</a:t>
+              <a:t>02.10.2026</a:t>
             </a:fld>
             <a:endParaRPr lang="ru-RU"/>
           </a:p>
@@ -464,7 +464,7 @@
             <a:fld id="{5B106E36-FD25-4E2D-B0AA-010F637433A0}" type="datetimeFigureOut">
               <a:rPr lang="ru-RU" smtClean="0"/>
               <a:pPr/>
-              <a:t>24.09.2026</a:t>
+              <a:t>02.10.2026</a:t>
             </a:fld>
             <a:endParaRPr lang="ru-RU"/>
           </a:p>
@@ -641,7 +641,7 @@
             <a:fld id="{5B106E36-FD25-4E2D-B0AA-010F637433A0}" type="datetimeFigureOut">
               <a:rPr lang="ru-RU" smtClean="0"/>
               <a:pPr/>
-              <a:t>24.09.2026</a:t>
+              <a:t>02.10.2026</a:t>
             </a:fld>
             <a:endParaRPr lang="ru-RU"/>
           </a:p>
@@ -808,7 +808,7 @@
             <a:fld id="{5B106E36-FD25-4E2D-B0AA-010F637433A0}" type="datetimeFigureOut">
               <a:rPr lang="ru-RU" smtClean="0"/>
               <a:pPr/>
-              <a:t>24.09.2026</a:t>
+              <a:t>02.10.2026</a:t>
             </a:fld>
             <a:endParaRPr lang="ru-RU"/>
           </a:p>
@@ -1051,7 +1051,7 @@
             <a:fld id="{5B106E36-FD25-4E2D-B0AA-010F637433A0}" type="datetimeFigureOut">
               <a:rPr lang="ru-RU" smtClean="0"/>
               <a:pPr/>
-              <a:t>24.09.2026</a:t>
+              <a:t>02.10.2026</a:t>
             </a:fld>
             <a:endParaRPr lang="ru-RU"/>
           </a:p>
@@ -1336,7 +1336,7 @@
             <a:fld id="{5B106E36-FD25-4E2D-B0AA-010F637433A0}" type="datetimeFigureOut">
               <a:rPr lang="ru-RU" smtClean="0"/>
               <a:pPr/>
-              <a:t>24.09.2026</a:t>
+              <a:t>02.10.2026</a:t>
             </a:fld>
             <a:endParaRPr lang="ru-RU"/>
           </a:p>
@@ -1755,7 +1755,7 @@
             <a:fld id="{5B106E36-FD25-4E2D-B0AA-010F637433A0}" type="datetimeFigureOut">
               <a:rPr lang="ru-RU" smtClean="0"/>
               <a:pPr/>
-              <a:t>24.09.2026</a:t>
+              <a:t>02.10.2026</a:t>
             </a:fld>
             <a:endParaRPr lang="ru-RU"/>
           </a:p>
@@ -1870,7 +1870,7 @@
             <a:fld id="{5B106E36-FD25-4E2D-B0AA-010F637433A0}" type="datetimeFigureOut">
               <a:rPr lang="ru-RU" smtClean="0"/>
               <a:pPr/>
-              <a:t>24.09.2026</a:t>
+              <a:t>02.10.2026</a:t>
             </a:fld>
             <a:endParaRPr lang="ru-RU"/>
           </a:p>
@@ -1962,7 +1962,7 @@
             <a:fld id="{5B106E36-FD25-4E2D-B0AA-010F637433A0}" type="datetimeFigureOut">
               <a:rPr lang="ru-RU" smtClean="0"/>
               <a:pPr/>
-              <a:t>24.09.2026</a:t>
+              <a:t>02.10.2026</a:t>
             </a:fld>
             <a:endParaRPr lang="ru-RU"/>
           </a:p>
@@ -2236,7 +2236,7 @@
             <a:fld id="{5B106E36-FD25-4E2D-B0AA-010F637433A0}" type="datetimeFigureOut">
               <a:rPr lang="ru-RU" smtClean="0"/>
               <a:pPr/>
-              <a:t>24.09.2026</a:t>
+              <a:t>02.10.2026</a:t>
             </a:fld>
             <a:endParaRPr lang="ru-RU"/>
           </a:p>
@@ -2486,7 +2486,7 @@
             <a:fld id="{5B106E36-FD25-4E2D-B0AA-010F637433A0}" type="datetimeFigureOut">
               <a:rPr lang="ru-RU" smtClean="0"/>
               <a:pPr/>
-              <a:t>24.09.2026</a:t>
+              <a:t>02.10.2026</a:t>
             </a:fld>
             <a:endParaRPr lang="ru-RU"/>
           </a:p>
@@ -2696,7 +2696,7 @@
             <a:fld id="{5B106E36-FD25-4E2D-B0AA-010F637433A0}" type="datetimeFigureOut">
               <a:rPr lang="ru-RU" smtClean="0"/>
               <a:pPr/>
-              <a:t>24.09.2026</a:t>
+              <a:t>02.10.2026</a:t>
             </a:fld>
             <a:endParaRPr lang="ru-RU"/>
           </a:p>
@@ -3427,14 +3427,7 @@
                 <a:latin typeface="Times New Roman" pitchFamily="18" charset="0"/>
                 <a:cs typeface="Times New Roman" pitchFamily="18" charset="0"/>
               </a:rPr>
-              <a:t>Логическая </a:t>
-            </a:r>
-            <a:r>
-              <a:rPr lang="ru-RU" sz="1400" b="1" dirty="0" smtClean="0">
-                <a:latin typeface="Times New Roman" pitchFamily="18" charset="0"/>
-                <a:cs typeface="Times New Roman" pitchFamily="18" charset="0"/>
-              </a:rPr>
-              <a:t>модель</a:t>
+              <a:t>Логическая модель</a:t>
             </a:r>
             <a:r>
               <a:rPr lang="ru-RU" sz="1400" dirty="0" smtClean="0">
@@ -3827,10 +3820,6 @@
               </a:rPr>
               <a:t>Пример: классы Клиент, Заказ, Товар; связи «Клиент делает Заказ», «Заказ содержит Товары». Атрибуты — только ключевые: Имя клиента, Дата заказа, Цена товара. Никаких типов данных, индексов или названий колонок БД.</a:t>
             </a:r>
-            <a:endParaRPr lang="ru-RU" sz="1500" dirty="0" smtClean="0">
-              <a:latin typeface="Times New Roman" pitchFamily="18" charset="0"/>
-              <a:cs typeface="Times New Roman" pitchFamily="18" charset="0"/>
-            </a:endParaRPr>
           </a:p>
         </p:txBody>
       </p:sp>
@@ -4307,7 +4296,7 @@
           <a:blip r:embed="rId2">
             <a:extLst>
               <a:ext uri="{28A0092B-C50C-407E-A947-70E740481C1C}">
-                <a14:useLocalDpi xmlns:ve="http://schemas.openxmlformats.org/markup-compatibility/2006" xmlns:m="http://schemas.openxmlformats.org/officeDocument/2006/math" xmlns:wp="http://schemas.openxmlformats.org/drawingml/2006/wordprocessingDrawing" xmlns:wne="http://schemas.microsoft.com/office/word/2006/wordml" xmlns:a14="http://schemas.microsoft.com/office/drawing/2010/main" xmlns:wps="http://schemas.microsoft.com/office/word/2010/wordprocessingShape" xmlns:wpi="http://schemas.microsoft.com/office/word/2010/wordprocessingInk" xmlns:wpg="http://schemas.microsoft.com/office/word/2010/wordprocessingGroup" xmlns:w16se="http://schemas.microsoft.com/office/word/2015/wordml/symex" xmlns:w16sdtdh="http://schemas.microsoft.com/office/word/2020/wordml/sdtdatahash" xmlns:w16="http://schemas.microsoft.com/office/word/2018/wordml" xmlns:w16cid="http://schemas.microsoft.com/office/word/2016/wordml/cid" xmlns:w16cex="http://schemas.microsoft.com/office/word/2018/wordml/cex" xmlns:w15="http://schemas.microsoft.com/office/word/2012/wordml" xmlns:w14="http://schemas.microsoft.com/office/word/2010/wordml" xmlns:w="http://schemas.openxmlformats.org/wordprocessingml/2006/main" xmlns:w10="urn:schemas-microsoft-com:office:word" xmlns:wp14="http://schemas.microsoft.com/office/word/2010/wordprocessingDrawing" xmlns:v="urn:schemas-microsoft-com:vml" xmlns:o="urn:schemas-microsoft-com:office:office" xmlns:am3d="http://schemas.microsoft.com/office/drawing/2017/model3d" xmlns:aink="http://schemas.microsoft.com/office/drawing/2016/ink" xmlns:mc="http://schemas.openxmlformats.org/markup-compatibility/2006" xmlns:cx8="http://schemas.microsoft.com/office/drawing/2016/5/14/chartex" xmlns:cx7="http://schemas.microsoft.com/office/drawing/2016/5/13/chartex" xmlns:cx6="http://schemas.microsoft.com/office/drawing/2016/5/12/chartex" xmlns:cx5="http://schemas.microsoft.com/office/drawing/2016/5/11/chartex" xmlns:cx4="http://schemas.microsoft.com/office/drawing/2016/5/10/chartex" xmlns:cx3="http://schemas.microsoft.com/office/drawing/2016/5/9/chartex" xmlns:cx2="http://schemas.microsoft.com/office/drawing/2015/10/21/chartex" xmlns:cx1="http://schemas.microsoft.com/office/drawing/2015/9/8/chartex" xmlns:cx="http://schemas.microsoft.com/office/drawing/2014/chartex" xmlns:wpc="http://schemas.microsoft.com/office/word/2010/wordprocessingCanvas" xmlns="" xmlns:pic="http://schemas.openxmlformats.org/drawingml/2006/picture" xmlns:lc="http://schemas.openxmlformats.org/drawingml/2006/lockedCanvas" val="0"/>
+                <a14:useLocalDpi xmlns:lc="http://schemas.openxmlformats.org/drawingml/2006/lockedCanvas" xmlns:pic="http://schemas.openxmlformats.org/drawingml/2006/picture" xmlns="" xmlns:wpc="http://schemas.microsoft.com/office/word/2010/wordprocessingCanvas" xmlns:cx="http://schemas.microsoft.com/office/drawing/2014/chartex" xmlns:cx1="http://schemas.microsoft.com/office/drawing/2015/9/8/chartex" xmlns:cx2="http://schemas.microsoft.com/office/drawing/2015/10/21/chartex" xmlns:cx3="http://schemas.microsoft.com/office/drawing/2016/5/9/chartex" xmlns:cx4="http://schemas.microsoft.com/office/drawing/2016/5/10/chartex" xmlns:cx5="http://schemas.microsoft.com/office/drawing/2016/5/11/chartex" xmlns:cx6="http://schemas.microsoft.com/office/drawing/2016/5/12/chartex" xmlns:cx7="http://schemas.microsoft.com/office/drawing/2016/5/13/chartex" xmlns:cx8="http://schemas.microsoft.com/office/drawing/2016/5/14/chartex" xmlns:mc="http://schemas.openxmlformats.org/markup-compatibility/2006" xmlns:aink="http://schemas.microsoft.com/office/drawing/2016/ink" xmlns:am3d="http://schemas.microsoft.com/office/drawing/2017/model3d" xmlns:o="urn:schemas-microsoft-com:office:office" xmlns:v="urn:schemas-microsoft-com:vml" xmlns:wp14="http://schemas.microsoft.com/office/word/2010/wordprocessingDrawing" xmlns:w10="urn:schemas-microsoft-com:office:word" xmlns:w="http://schemas.openxmlformats.org/wordprocessingml/2006/main" xmlns:w14="http://schemas.microsoft.com/office/word/2010/wordml" xmlns:w15="http://schemas.microsoft.com/office/word/2012/wordml" xmlns:w16cex="http://schemas.microsoft.com/office/word/2018/wordml/cex" xmlns:w16cid="http://schemas.microsoft.com/office/word/2016/wordml/cid" xmlns:w16="http://schemas.microsoft.com/office/word/2018/wordml" xmlns:w16sdtdh="http://schemas.microsoft.com/office/word/2020/wordml/sdtdatahash" xmlns:w16se="http://schemas.microsoft.com/office/word/2015/wordml/symex" xmlns:wpg="http://schemas.microsoft.com/office/word/2010/wordprocessingGroup" xmlns:wpi="http://schemas.microsoft.com/office/word/2010/wordprocessingInk" xmlns:wps="http://schemas.microsoft.com/office/word/2010/wordprocessingShape" xmlns:a14="http://schemas.microsoft.com/office/drawing/2010/main" xmlns:wne="http://schemas.microsoft.com/office/word/2006/wordml" xmlns:wp="http://schemas.openxmlformats.org/drawingml/2006/wordprocessingDrawing" xmlns:m="http://schemas.openxmlformats.org/officeDocument/2006/math" xmlns:ve="http://schemas.openxmlformats.org/markup-compatibility/2006" val="0"/>
               </a:ext>
             </a:extLst>
           </a:blip>
@@ -5436,8 +5425,8 @@
         </p:nvSpPr>
         <p:spPr>
           <a:xfrm>
-            <a:off x="1275688" y="-208974"/>
-            <a:ext cx="6439584" cy="923330"/>
+            <a:off x="0" y="-208974"/>
+            <a:ext cx="9144000" cy="923330"/>
           </a:xfrm>
           <a:prstGeom prst="rect">
             <a:avLst/>
@@ -5445,7 +5434,7 @@
           <a:noFill/>
         </p:spPr>
         <p:txBody>
-          <a:bodyPr wrap="none" lIns="91440" tIns="45720" rIns="91440" bIns="45720">
+          <a:bodyPr wrap="square" lIns="91440" tIns="45720" rIns="91440" bIns="45720">
             <a:spAutoFit/>
             <a:scene3d>
               <a:camera prst="orthographicFront"/>
@@ -5466,7 +5455,7 @@
           <a:p>
             <a:pPr algn="ctr"/>
             <a:r>
-              <a:rPr lang="en-US" sz="5400" b="1" dirty="0" smtClean="0">
+              <a:rPr lang="ru-RU" sz="5400" b="1" dirty="0" smtClean="0">
                 <a:ln w="11430"/>
                 <a:gradFill>
                   <a:gsLst>
@@ -5501,7 +5490,7 @@
                   </a:outerShdw>
                 </a:effectLst>
               </a:rPr>
-              <a:t>Deployment-diagram</a:t>
+              <a:t>Диаграмма кооперации</a:t>
             </a:r>
             <a:endParaRPr lang="ru-RU" sz="5400" b="1" cap="none" spc="0" dirty="0">
               <a:ln w="11430"/>
